--- a/assets/downloads/Session-4-Social-Media-and-Youth-Work-Practices.pptx
+++ b/assets/downloads/Session-4-Social-Media-and-Youth-Work-Practices.pptx
@@ -5,40 +5,40 @@
     <p:sldMasterId id="2147483648" r:id="rId1"/>
   </p:sldMasterIdLst>
   <p:sldIdLst>
-    <p:sldId id="256" r:id="rId7"/>
-    <p:sldId id="257" r:id="rId8"/>
-    <p:sldId id="258" r:id="rId9"/>
-    <p:sldId id="259" r:id="rId10"/>
-    <p:sldId id="260" r:id="rId11"/>
-    <p:sldId id="261" r:id="rId12"/>
-    <p:sldId id="262" r:id="rId13"/>
-    <p:sldId id="263" r:id="rId14"/>
-    <p:sldId id="264" r:id="rId15"/>
-    <p:sldId id="265" r:id="rId16"/>
-    <p:sldId id="266" r:id="rId17"/>
-    <p:sldId id="267" r:id="rId18"/>
-    <p:sldId id="268" r:id="rId19"/>
-    <p:sldId id="269" r:id="rId20"/>
-    <p:sldId id="270" r:id="rId21"/>
-    <p:sldId id="271" r:id="rId22"/>
-    <p:sldId id="272" r:id="rId23"/>
-    <p:sldId id="273" r:id="rId24"/>
-    <p:sldId id="274" r:id="rId25"/>
-    <p:sldId id="275" r:id="rId26"/>
-    <p:sldId id="276" r:id="rId27"/>
-    <p:sldId id="277" r:id="rId28"/>
-    <p:sldId id="278" r:id="rId29"/>
-    <p:sldId id="279" r:id="rId30"/>
-    <p:sldId id="280" r:id="rId31"/>
-    <p:sldId id="281" r:id="rId32"/>
-    <p:sldId id="282" r:id="rId33"/>
-    <p:sldId id="283" r:id="rId34"/>
-    <p:sldId id="284" r:id="rId35"/>
-    <p:sldId id="285" r:id="rId36"/>
-    <p:sldId id="286" r:id="rId37"/>
-    <p:sldId id="287" r:id="rId38"/>
+    <p:sldId id="256" r:id="rId2"/>
+    <p:sldId id="257" r:id="rId3"/>
+    <p:sldId id="258" r:id="rId4"/>
+    <p:sldId id="259" r:id="rId5"/>
+    <p:sldId id="260" r:id="rId6"/>
+    <p:sldId id="261" r:id="rId7"/>
+    <p:sldId id="262" r:id="rId8"/>
+    <p:sldId id="263" r:id="rId9"/>
+    <p:sldId id="264" r:id="rId10"/>
+    <p:sldId id="265" r:id="rId11"/>
+    <p:sldId id="266" r:id="rId12"/>
+    <p:sldId id="267" r:id="rId13"/>
+    <p:sldId id="268" r:id="rId14"/>
+    <p:sldId id="269" r:id="rId15"/>
+    <p:sldId id="270" r:id="rId16"/>
+    <p:sldId id="271" r:id="rId17"/>
+    <p:sldId id="272" r:id="rId18"/>
+    <p:sldId id="273" r:id="rId19"/>
+    <p:sldId id="274" r:id="rId20"/>
+    <p:sldId id="275" r:id="rId21"/>
+    <p:sldId id="276" r:id="rId22"/>
+    <p:sldId id="277" r:id="rId23"/>
+    <p:sldId id="278" r:id="rId24"/>
+    <p:sldId id="279" r:id="rId25"/>
+    <p:sldId id="280" r:id="rId26"/>
+    <p:sldId id="281" r:id="rId27"/>
+    <p:sldId id="282" r:id="rId28"/>
+    <p:sldId id="283" r:id="rId29"/>
+    <p:sldId id="284" r:id="rId30"/>
+    <p:sldId id="285" r:id="rId31"/>
+    <p:sldId id="286" r:id="rId32"/>
+    <p:sldId id="287" r:id="rId33"/>
   </p:sldIdLst>
-  <p:sldSz cx="12191695" cy="6858000" type="screen4x3"/>
+  <p:sldSz cx="12192000" cy="6858000"/>
   <p:notesSz cx="6858000" cy="9144000"/>
   <p:defaultTextStyle>
     <a:defPPr>
@@ -135,6 +135,22 @@
       </a:defRPr>
     </a:lvl9pPr>
   </p:defaultTextStyle>
+  <p:extLst>
+    <p:ext uri="{EFAFB233-063F-42B5-8137-9DF3F51BA10A}">
+      <p15:sldGuideLst xmlns:p15="http://schemas.microsoft.com/office/powerpoint/2012/main">
+        <p15:guide id="1" orient="horz" pos="2160">
+          <p15:clr>
+            <a:srgbClr val="A4A3A4"/>
+          </p15:clr>
+        </p15:guide>
+        <p15:guide id="2" pos="2880">
+          <p15:clr>
+            <a:srgbClr val="A4A3A4"/>
+          </p15:clr>
+        </p15:guide>
+      </p15:sldGuideLst>
+    </p:ext>
+  </p:extLst>
 </p:presentation>
 </file>
 
@@ -176,10 +192,9 @@
           <a:lstStyle/>
           <a:p>
             <a:r>
-              <a:rPr lang="en-US" smtClean="0"/>
+              <a:rPr lang="en-US"/>
               <a:t>Click to edit Master title style</a:t>
             </a:r>
-            <a:endParaRPr lang="en-US"/>
           </a:p>
         </p:txBody>
       </p:sp>
@@ -295,10 +310,9 @@
           </a:lstStyle>
           <a:p>
             <a:r>
-              <a:rPr lang="en-US" smtClean="0"/>
+              <a:rPr lang="en-US"/>
               <a:t>Click to edit Master subtitle style</a:t>
             </a:r>
-            <a:endParaRPr lang="en-US"/>
           </a:p>
         </p:txBody>
       </p:sp>
@@ -319,7 +333,7 @@
           <a:p>
             <a:fld id="{5BCAD085-E8A6-8845-BD4E-CB4CCA059FC4}" type="datetimeFigureOut">
               <a:rPr lang="en-US" smtClean="0"/>
-              <a:t>1/27/13</a:t>
+              <a:t>4/16/26</a:t>
             </a:fld>
             <a:endParaRPr lang="en-US"/>
           </a:p>
@@ -413,10 +427,9 @@
           <a:lstStyle/>
           <a:p>
             <a:r>
-              <a:rPr lang="en-US" smtClean="0"/>
+              <a:rPr lang="en-US"/>
               <a:t>Click to edit Master title style</a:t>
             </a:r>
-            <a:endParaRPr lang="en-US"/>
           </a:p>
         </p:txBody>
       </p:sp>
@@ -437,38 +450,37 @@
           <a:p>
             <a:pPr lvl="0"/>
             <a:r>
-              <a:rPr lang="en-US" smtClean="0"/>
+              <a:rPr lang="en-US"/>
               <a:t>Click to edit Master text styles</a:t>
             </a:r>
           </a:p>
           <a:p>
             <a:pPr lvl="1"/>
             <a:r>
-              <a:rPr lang="en-US" smtClean="0"/>
+              <a:rPr lang="en-US"/>
               <a:t>Second level</a:t>
             </a:r>
           </a:p>
           <a:p>
             <a:pPr lvl="2"/>
             <a:r>
-              <a:rPr lang="en-US" smtClean="0"/>
+              <a:rPr lang="en-US"/>
               <a:t>Third level</a:t>
             </a:r>
           </a:p>
           <a:p>
             <a:pPr lvl="3"/>
             <a:r>
-              <a:rPr lang="en-US" smtClean="0"/>
+              <a:rPr lang="en-US"/>
               <a:t>Fourth level</a:t>
             </a:r>
           </a:p>
           <a:p>
             <a:pPr lvl="4"/>
             <a:r>
-              <a:rPr lang="en-US" smtClean="0"/>
+              <a:rPr lang="en-US"/>
               <a:t>Fifth level</a:t>
             </a:r>
-            <a:endParaRPr lang="en-US"/>
           </a:p>
         </p:txBody>
       </p:sp>
@@ -489,7 +501,7 @@
           <a:p>
             <a:fld id="{5BCAD085-E8A6-8845-BD4E-CB4CCA059FC4}" type="datetimeFigureOut">
               <a:rPr lang="en-US" smtClean="0"/>
-              <a:t>1/27/13</a:t>
+              <a:t>4/16/26</a:t>
             </a:fld>
             <a:endParaRPr lang="en-US"/>
           </a:p>
@@ -588,10 +600,9 @@
           <a:lstStyle/>
           <a:p>
             <a:r>
-              <a:rPr lang="en-US" smtClean="0"/>
+              <a:rPr lang="en-US"/>
               <a:t>Click to edit Master title style</a:t>
             </a:r>
-            <a:endParaRPr lang="en-US"/>
           </a:p>
         </p:txBody>
       </p:sp>
@@ -617,38 +628,37 @@
           <a:p>
             <a:pPr lvl="0"/>
             <a:r>
-              <a:rPr lang="en-US" smtClean="0"/>
+              <a:rPr lang="en-US"/>
               <a:t>Click to edit Master text styles</a:t>
             </a:r>
           </a:p>
           <a:p>
             <a:pPr lvl="1"/>
             <a:r>
-              <a:rPr lang="en-US" smtClean="0"/>
+              <a:rPr lang="en-US"/>
               <a:t>Second level</a:t>
             </a:r>
           </a:p>
           <a:p>
             <a:pPr lvl="2"/>
             <a:r>
-              <a:rPr lang="en-US" smtClean="0"/>
+              <a:rPr lang="en-US"/>
               <a:t>Third level</a:t>
             </a:r>
           </a:p>
           <a:p>
             <a:pPr lvl="3"/>
             <a:r>
-              <a:rPr lang="en-US" smtClean="0"/>
+              <a:rPr lang="en-US"/>
               <a:t>Fourth level</a:t>
             </a:r>
           </a:p>
           <a:p>
             <a:pPr lvl="4"/>
             <a:r>
-              <a:rPr lang="en-US" smtClean="0"/>
+              <a:rPr lang="en-US"/>
               <a:t>Fifth level</a:t>
             </a:r>
-            <a:endParaRPr lang="en-US"/>
           </a:p>
         </p:txBody>
       </p:sp>
@@ -669,7 +679,7 @@
           <a:p>
             <a:fld id="{5BCAD085-E8A6-8845-BD4E-CB4CCA059FC4}" type="datetimeFigureOut">
               <a:rPr lang="en-US" smtClean="0"/>
-              <a:t>1/27/13</a:t>
+              <a:t>4/16/26</a:t>
             </a:fld>
             <a:endParaRPr lang="en-US"/>
           </a:p>
@@ -763,10 +773,9 @@
           <a:lstStyle/>
           <a:p>
             <a:r>
-              <a:rPr lang="en-US" smtClean="0"/>
+              <a:rPr lang="en-US"/>
               <a:t>Click to edit Master title style</a:t>
             </a:r>
-            <a:endParaRPr lang="en-US"/>
           </a:p>
         </p:txBody>
       </p:sp>
@@ -787,38 +796,37 @@
           <a:p>
             <a:pPr lvl="0"/>
             <a:r>
-              <a:rPr lang="en-US" smtClean="0"/>
+              <a:rPr lang="en-US"/>
               <a:t>Click to edit Master text styles</a:t>
             </a:r>
           </a:p>
           <a:p>
             <a:pPr lvl="1"/>
             <a:r>
-              <a:rPr lang="en-US" smtClean="0"/>
+              <a:rPr lang="en-US"/>
               <a:t>Second level</a:t>
             </a:r>
           </a:p>
           <a:p>
             <a:pPr lvl="2"/>
             <a:r>
-              <a:rPr lang="en-US" smtClean="0"/>
+              <a:rPr lang="en-US"/>
               <a:t>Third level</a:t>
             </a:r>
           </a:p>
           <a:p>
             <a:pPr lvl="3"/>
             <a:r>
-              <a:rPr lang="en-US" smtClean="0"/>
+              <a:rPr lang="en-US"/>
               <a:t>Fourth level</a:t>
             </a:r>
           </a:p>
           <a:p>
             <a:pPr lvl="4"/>
             <a:r>
-              <a:rPr lang="en-US" smtClean="0"/>
+              <a:rPr lang="en-US"/>
               <a:t>Fifth level</a:t>
             </a:r>
-            <a:endParaRPr lang="en-US"/>
           </a:p>
         </p:txBody>
       </p:sp>
@@ -839,7 +847,7 @@
           <a:p>
             <a:fld id="{5BCAD085-E8A6-8845-BD4E-CB4CCA059FC4}" type="datetimeFigureOut">
               <a:rPr lang="en-US" smtClean="0"/>
-              <a:t>1/27/13</a:t>
+              <a:t>4/16/26</a:t>
             </a:fld>
             <a:endParaRPr lang="en-US"/>
           </a:p>
@@ -942,10 +950,9 @@
           </a:lstStyle>
           <a:p>
             <a:r>
-              <a:rPr lang="en-US" smtClean="0"/>
+              <a:rPr lang="en-US"/>
               <a:t>Click to edit Master title style</a:t>
             </a:r>
-            <a:endParaRPr lang="en-US"/>
           </a:p>
         </p:txBody>
       </p:sp>
@@ -1062,7 +1069,7 @@
           <a:p>
             <a:pPr lvl="0"/>
             <a:r>
-              <a:rPr lang="en-US" smtClean="0"/>
+              <a:rPr lang="en-US"/>
               <a:t>Click to edit Master text styles</a:t>
             </a:r>
           </a:p>
@@ -1085,7 +1092,7 @@
           <a:p>
             <a:fld id="{5BCAD085-E8A6-8845-BD4E-CB4CCA059FC4}" type="datetimeFigureOut">
               <a:rPr lang="en-US" smtClean="0"/>
-              <a:t>1/27/13</a:t>
+              <a:t>4/16/26</a:t>
             </a:fld>
             <a:endParaRPr lang="en-US"/>
           </a:p>
@@ -1179,10 +1186,9 @@
           <a:lstStyle/>
           <a:p>
             <a:r>
-              <a:rPr lang="en-US" smtClean="0"/>
+              <a:rPr lang="en-US"/>
               <a:t>Click to edit Master title style</a:t>
             </a:r>
-            <a:endParaRPr lang="en-US"/>
           </a:p>
         </p:txBody>
       </p:sp>
@@ -1236,38 +1242,37 @@
           <a:p>
             <a:pPr lvl="0"/>
             <a:r>
-              <a:rPr lang="en-US" smtClean="0"/>
+              <a:rPr lang="en-US"/>
               <a:t>Click to edit Master text styles</a:t>
             </a:r>
           </a:p>
           <a:p>
             <a:pPr lvl="1"/>
             <a:r>
-              <a:rPr lang="en-US" smtClean="0"/>
+              <a:rPr lang="en-US"/>
               <a:t>Second level</a:t>
             </a:r>
           </a:p>
           <a:p>
             <a:pPr lvl="2"/>
             <a:r>
-              <a:rPr lang="en-US" smtClean="0"/>
+              <a:rPr lang="en-US"/>
               <a:t>Third level</a:t>
             </a:r>
           </a:p>
           <a:p>
             <a:pPr lvl="3"/>
             <a:r>
-              <a:rPr lang="en-US" smtClean="0"/>
+              <a:rPr lang="en-US"/>
               <a:t>Fourth level</a:t>
             </a:r>
           </a:p>
           <a:p>
             <a:pPr lvl="4"/>
             <a:r>
-              <a:rPr lang="en-US" smtClean="0"/>
+              <a:rPr lang="en-US"/>
               <a:t>Fifth level</a:t>
             </a:r>
-            <a:endParaRPr lang="en-US"/>
           </a:p>
         </p:txBody>
       </p:sp>
@@ -1321,38 +1326,37 @@
           <a:p>
             <a:pPr lvl="0"/>
             <a:r>
-              <a:rPr lang="en-US" smtClean="0"/>
+              <a:rPr lang="en-US"/>
               <a:t>Click to edit Master text styles</a:t>
             </a:r>
           </a:p>
           <a:p>
             <a:pPr lvl="1"/>
             <a:r>
-              <a:rPr lang="en-US" smtClean="0"/>
+              <a:rPr lang="en-US"/>
               <a:t>Second level</a:t>
             </a:r>
           </a:p>
           <a:p>
             <a:pPr lvl="2"/>
             <a:r>
-              <a:rPr lang="en-US" smtClean="0"/>
+              <a:rPr lang="en-US"/>
               <a:t>Third level</a:t>
             </a:r>
           </a:p>
           <a:p>
             <a:pPr lvl="3"/>
             <a:r>
-              <a:rPr lang="en-US" smtClean="0"/>
+              <a:rPr lang="en-US"/>
               <a:t>Fourth level</a:t>
             </a:r>
           </a:p>
           <a:p>
             <a:pPr lvl="4"/>
             <a:r>
-              <a:rPr lang="en-US" smtClean="0"/>
+              <a:rPr lang="en-US"/>
               <a:t>Fifth level</a:t>
             </a:r>
-            <a:endParaRPr lang="en-US"/>
           </a:p>
         </p:txBody>
       </p:sp>
@@ -1373,7 +1377,7 @@
           <a:p>
             <a:fld id="{5BCAD085-E8A6-8845-BD4E-CB4CCA059FC4}" type="datetimeFigureOut">
               <a:rPr lang="en-US" smtClean="0"/>
-              <a:t>1/27/13</a:t>
+              <a:t>4/16/26</a:t>
             </a:fld>
             <a:endParaRPr lang="en-US"/>
           </a:p>
@@ -1471,10 +1475,9 @@
           </a:lstStyle>
           <a:p>
             <a:r>
-              <a:rPr lang="en-US" smtClean="0"/>
+              <a:rPr lang="en-US"/>
               <a:t>Click to edit Master title style</a:t>
             </a:r>
-            <a:endParaRPr lang="en-US"/>
           </a:p>
         </p:txBody>
       </p:sp>
@@ -1537,7 +1540,7 @@
           <a:p>
             <a:pPr lvl="0"/>
             <a:r>
-              <a:rPr lang="en-US" smtClean="0"/>
+              <a:rPr lang="en-US"/>
               <a:t>Click to edit Master text styles</a:t>
             </a:r>
           </a:p>
@@ -1593,38 +1596,37 @@
           <a:p>
             <a:pPr lvl="0"/>
             <a:r>
-              <a:rPr lang="en-US" smtClean="0"/>
+              <a:rPr lang="en-US"/>
               <a:t>Click to edit Master text styles</a:t>
             </a:r>
           </a:p>
           <a:p>
             <a:pPr lvl="1"/>
             <a:r>
-              <a:rPr lang="en-US" smtClean="0"/>
+              <a:rPr lang="en-US"/>
               <a:t>Second level</a:t>
             </a:r>
           </a:p>
           <a:p>
             <a:pPr lvl="2"/>
             <a:r>
-              <a:rPr lang="en-US" smtClean="0"/>
+              <a:rPr lang="en-US"/>
               <a:t>Third level</a:t>
             </a:r>
           </a:p>
           <a:p>
             <a:pPr lvl="3"/>
             <a:r>
-              <a:rPr lang="en-US" smtClean="0"/>
+              <a:rPr lang="en-US"/>
               <a:t>Fourth level</a:t>
             </a:r>
           </a:p>
           <a:p>
             <a:pPr lvl="4"/>
             <a:r>
-              <a:rPr lang="en-US" smtClean="0"/>
+              <a:rPr lang="en-US"/>
               <a:t>Fifth level</a:t>
             </a:r>
-            <a:endParaRPr lang="en-US"/>
           </a:p>
         </p:txBody>
       </p:sp>
@@ -1687,7 +1689,7 @@
           <a:p>
             <a:pPr lvl="0"/>
             <a:r>
-              <a:rPr lang="en-US" smtClean="0"/>
+              <a:rPr lang="en-US"/>
               <a:t>Click to edit Master text styles</a:t>
             </a:r>
           </a:p>
@@ -1743,38 +1745,37 @@
           <a:p>
             <a:pPr lvl="0"/>
             <a:r>
-              <a:rPr lang="en-US" smtClean="0"/>
+              <a:rPr lang="en-US"/>
               <a:t>Click to edit Master text styles</a:t>
             </a:r>
           </a:p>
           <a:p>
             <a:pPr lvl="1"/>
             <a:r>
-              <a:rPr lang="en-US" smtClean="0"/>
+              <a:rPr lang="en-US"/>
               <a:t>Second level</a:t>
             </a:r>
           </a:p>
           <a:p>
             <a:pPr lvl="2"/>
             <a:r>
-              <a:rPr lang="en-US" smtClean="0"/>
+              <a:rPr lang="en-US"/>
               <a:t>Third level</a:t>
             </a:r>
           </a:p>
           <a:p>
             <a:pPr lvl="3"/>
             <a:r>
-              <a:rPr lang="en-US" smtClean="0"/>
+              <a:rPr lang="en-US"/>
               <a:t>Fourth level</a:t>
             </a:r>
           </a:p>
           <a:p>
             <a:pPr lvl="4"/>
             <a:r>
-              <a:rPr lang="en-US" smtClean="0"/>
+              <a:rPr lang="en-US"/>
               <a:t>Fifth level</a:t>
             </a:r>
-            <a:endParaRPr lang="en-US"/>
           </a:p>
         </p:txBody>
       </p:sp>
@@ -1795,7 +1796,7 @@
           <a:p>
             <a:fld id="{5BCAD085-E8A6-8845-BD4E-CB4CCA059FC4}" type="datetimeFigureOut">
               <a:rPr lang="en-US" smtClean="0"/>
-              <a:t>1/27/13</a:t>
+              <a:t>4/16/26</a:t>
             </a:fld>
             <a:endParaRPr lang="en-US"/>
           </a:p>
@@ -1889,10 +1890,9 @@
           <a:lstStyle/>
           <a:p>
             <a:r>
-              <a:rPr lang="en-US" smtClean="0"/>
+              <a:rPr lang="en-US"/>
               <a:t>Click to edit Master title style</a:t>
             </a:r>
-            <a:endParaRPr lang="en-US"/>
           </a:p>
         </p:txBody>
       </p:sp>
@@ -1913,7 +1913,7 @@
           <a:p>
             <a:fld id="{5BCAD085-E8A6-8845-BD4E-CB4CCA059FC4}" type="datetimeFigureOut">
               <a:rPr lang="en-US" smtClean="0"/>
-              <a:t>1/27/13</a:t>
+              <a:t>4/16/26</a:t>
             </a:fld>
             <a:endParaRPr lang="en-US"/>
           </a:p>
@@ -2008,7 +2008,7 @@
           <a:p>
             <a:fld id="{5BCAD085-E8A6-8845-BD4E-CB4CCA059FC4}" type="datetimeFigureOut">
               <a:rPr lang="en-US" smtClean="0"/>
-              <a:t>1/27/13</a:t>
+              <a:t>4/16/26</a:t>
             </a:fld>
             <a:endParaRPr lang="en-US"/>
           </a:p>
@@ -2111,10 +2111,9 @@
           </a:lstStyle>
           <a:p>
             <a:r>
-              <a:rPr lang="en-US" smtClean="0"/>
+              <a:rPr lang="en-US"/>
               <a:t>Click to edit Master title style</a:t>
             </a:r>
-            <a:endParaRPr lang="en-US"/>
           </a:p>
         </p:txBody>
       </p:sp>
@@ -2168,38 +2167,37 @@
           <a:p>
             <a:pPr lvl="0"/>
             <a:r>
-              <a:rPr lang="en-US" smtClean="0"/>
+              <a:rPr lang="en-US"/>
               <a:t>Click to edit Master text styles</a:t>
             </a:r>
           </a:p>
           <a:p>
             <a:pPr lvl="1"/>
             <a:r>
-              <a:rPr lang="en-US" smtClean="0"/>
+              <a:rPr lang="en-US"/>
               <a:t>Second level</a:t>
             </a:r>
           </a:p>
           <a:p>
             <a:pPr lvl="2"/>
             <a:r>
-              <a:rPr lang="en-US" smtClean="0"/>
+              <a:rPr lang="en-US"/>
               <a:t>Third level</a:t>
             </a:r>
           </a:p>
           <a:p>
             <a:pPr lvl="3"/>
             <a:r>
-              <a:rPr lang="en-US" smtClean="0"/>
+              <a:rPr lang="en-US"/>
               <a:t>Fourth level</a:t>
             </a:r>
           </a:p>
           <a:p>
             <a:pPr lvl="4"/>
             <a:r>
-              <a:rPr lang="en-US" smtClean="0"/>
+              <a:rPr lang="en-US"/>
               <a:t>Fifth level</a:t>
             </a:r>
-            <a:endParaRPr lang="en-US"/>
           </a:p>
         </p:txBody>
       </p:sp>
@@ -2262,7 +2260,7 @@
           <a:p>
             <a:pPr lvl="0"/>
             <a:r>
-              <a:rPr lang="en-US" smtClean="0"/>
+              <a:rPr lang="en-US"/>
               <a:t>Click to edit Master text styles</a:t>
             </a:r>
           </a:p>
@@ -2285,7 +2283,7 @@
           <a:p>
             <a:fld id="{5BCAD085-E8A6-8845-BD4E-CB4CCA059FC4}" type="datetimeFigureOut">
               <a:rPr lang="en-US" smtClean="0"/>
-              <a:t>1/27/13</a:t>
+              <a:t>4/16/26</a:t>
             </a:fld>
             <a:endParaRPr lang="en-US"/>
           </a:p>
@@ -2388,10 +2386,9 @@
           </a:lstStyle>
           <a:p>
             <a:r>
-              <a:rPr lang="en-US" smtClean="0"/>
+              <a:rPr lang="en-US"/>
               <a:t>Click to edit Master title style</a:t>
             </a:r>
-            <a:endParaRPr lang="en-US"/>
           </a:p>
         </p:txBody>
       </p:sp>
@@ -2515,7 +2512,7 @@
           <a:p>
             <a:pPr lvl="0"/>
             <a:r>
-              <a:rPr lang="en-US" smtClean="0"/>
+              <a:rPr lang="en-US"/>
               <a:t>Click to edit Master text styles</a:t>
             </a:r>
           </a:p>
@@ -2538,7 +2535,7 @@
           <a:p>
             <a:fld id="{5BCAD085-E8A6-8845-BD4E-CB4CCA059FC4}" type="datetimeFigureOut">
               <a:rPr lang="en-US" smtClean="0"/>
-              <a:t>1/27/13</a:t>
+              <a:t>4/16/26</a:t>
             </a:fld>
             <a:endParaRPr lang="en-US"/>
           </a:p>
@@ -2647,10 +2644,9 @@
           <a:lstStyle/>
           <a:p>
             <a:r>
-              <a:rPr lang="en-US" smtClean="0"/>
+              <a:rPr lang="en-US"/>
               <a:t>Click to edit Master title style</a:t>
             </a:r>
-            <a:endParaRPr lang="en-US"/>
           </a:p>
         </p:txBody>
       </p:sp>
@@ -2681,38 +2677,37 @@
           <a:p>
             <a:pPr lvl="0"/>
             <a:r>
-              <a:rPr lang="en-US" smtClean="0"/>
+              <a:rPr lang="en-US"/>
               <a:t>Click to edit Master text styles</a:t>
             </a:r>
           </a:p>
           <a:p>
             <a:pPr lvl="1"/>
             <a:r>
-              <a:rPr lang="en-US" smtClean="0"/>
+              <a:rPr lang="en-US"/>
               <a:t>Second level</a:t>
             </a:r>
           </a:p>
           <a:p>
             <a:pPr lvl="2"/>
             <a:r>
-              <a:rPr lang="en-US" smtClean="0"/>
+              <a:rPr lang="en-US"/>
               <a:t>Third level</a:t>
             </a:r>
           </a:p>
           <a:p>
             <a:pPr lvl="3"/>
             <a:r>
-              <a:rPr lang="en-US" smtClean="0"/>
+              <a:rPr lang="en-US"/>
               <a:t>Fourth level</a:t>
             </a:r>
           </a:p>
           <a:p>
             <a:pPr lvl="4"/>
             <a:r>
-              <a:rPr lang="en-US" smtClean="0"/>
+              <a:rPr lang="en-US"/>
               <a:t>Fifth level</a:t>
             </a:r>
-            <a:endParaRPr lang="en-US"/>
           </a:p>
         </p:txBody>
       </p:sp>
@@ -2751,7 +2746,7 @@
           <a:p>
             <a:fld id="{5BCAD085-E8A6-8845-BD4E-CB4CCA059FC4}" type="datetimeFigureOut">
               <a:rPr lang="en-US" smtClean="0"/>
-              <a:t>1/27/13</a:t>
+              <a:t>4/16/26</a:t>
             </a:fld>
             <a:endParaRPr lang="en-US"/>
           </a:p>
@@ -3110,7 +3105,7 @@
 </file>
 
 <file path=ppt/slides/slide1.xml><?xml version="1.0" encoding="utf-8"?>
-<p:sld xmlns:a="http://schemas.openxmlformats.org/drawingml/2006/main" xmlns:p="http://schemas.openxmlformats.org/presentationml/2006/main" xmlns:r="http://schemas.openxmlformats.org/officeDocument/2006/relationships">
+<p:sld xmlns:a="http://schemas.openxmlformats.org/drawingml/2006/main" xmlns:r="http://schemas.openxmlformats.org/officeDocument/2006/relationships" xmlns:p="http://schemas.openxmlformats.org/presentationml/2006/main">
   <p:cSld>
     <p:bg>
       <p:bgPr>
@@ -3126,7 +3121,14 @@
         <p:cNvGrpSpPr/>
         <p:nvPr/>
       </p:nvGrpSpPr>
-      <p:grpSpPr/>
+      <p:grpSpPr>
+        <a:xfrm>
+          <a:off x="0" y="0"/>
+          <a:ext cx="0" cy="0"/>
+          <a:chOff x="0" y="0"/>
+          <a:chExt cx="0" cy="0"/>
+        </a:xfrm>
+      </p:grpSpPr>
       <p:sp>
         <p:nvSpPr>
           <p:cNvPr id="2" name="Rectangle 1"/>
@@ -3167,6 +3169,7 @@
           <a:lstStyle/>
           <a:p>
             <a:pPr algn="ctr"/>
+            <a:endParaRPr/>
           </a:p>
         </p:txBody>
       </p:sp>
@@ -3210,6 +3213,7 @@
           <a:lstStyle/>
           <a:p>
             <a:pPr algn="ctr"/>
+            <a:endParaRPr/>
           </a:p>
         </p:txBody>
       </p:sp>
@@ -3253,6 +3257,7 @@
           <a:lstStyle/>
           <a:p>
             <a:pPr algn="ctr"/>
+            <a:endParaRPr/>
           </a:p>
         </p:txBody>
       </p:sp>
@@ -3296,6 +3301,7 @@
           <a:lstStyle/>
           <a:p>
             <a:pPr algn="ctr"/>
+            <a:endParaRPr/>
           </a:p>
         </p:txBody>
       </p:sp>
@@ -3339,6 +3345,7 @@
           <a:lstStyle/>
           <a:p>
             <a:pPr algn="ctr"/>
+            <a:endParaRPr/>
           </a:p>
         </p:txBody>
       </p:sp>
@@ -3382,6 +3389,7 @@
           <a:lstStyle/>
           <a:p>
             <a:pPr algn="ctr"/>
+            <a:endParaRPr/>
           </a:p>
         </p:txBody>
       </p:sp>
@@ -3586,7 +3594,7 @@
 </file>
 
 <file path=ppt/slides/slide10.xml><?xml version="1.0" encoding="utf-8"?>
-<p:sld xmlns:a="http://schemas.openxmlformats.org/drawingml/2006/main" xmlns:p="http://schemas.openxmlformats.org/presentationml/2006/main" xmlns:r="http://schemas.openxmlformats.org/officeDocument/2006/relationships">
+<p:sld xmlns:a="http://schemas.openxmlformats.org/drawingml/2006/main" xmlns:r="http://schemas.openxmlformats.org/officeDocument/2006/relationships" xmlns:p="http://schemas.openxmlformats.org/presentationml/2006/main">
   <p:cSld>
     <p:bg>
       <p:bgPr>
@@ -3602,7 +3610,14 @@
         <p:cNvGrpSpPr/>
         <p:nvPr/>
       </p:nvGrpSpPr>
-      <p:grpSpPr/>
+      <p:grpSpPr>
+        <a:xfrm>
+          <a:off x="0" y="0"/>
+          <a:ext cx="0" cy="0"/>
+          <a:chOff x="0" y="0"/>
+          <a:chExt cx="0" cy="0"/>
+        </a:xfrm>
+      </p:grpSpPr>
       <p:sp>
         <p:nvSpPr>
           <p:cNvPr id="2" name="Rectangle 1"/>
@@ -3643,6 +3658,7 @@
           <a:lstStyle/>
           <a:p>
             <a:pPr algn="ctr"/>
+            <a:endParaRPr/>
           </a:p>
         </p:txBody>
       </p:sp>
@@ -3859,7 +3875,7 @@
 </file>
 
 <file path=ppt/slides/slide11.xml><?xml version="1.0" encoding="utf-8"?>
-<p:sld xmlns:a="http://schemas.openxmlformats.org/drawingml/2006/main" xmlns:p="http://schemas.openxmlformats.org/presentationml/2006/main" xmlns:r="http://schemas.openxmlformats.org/officeDocument/2006/relationships">
+<p:sld xmlns:a="http://schemas.openxmlformats.org/drawingml/2006/main" xmlns:r="http://schemas.openxmlformats.org/officeDocument/2006/relationships" xmlns:p="http://schemas.openxmlformats.org/presentationml/2006/main">
   <p:cSld>
     <p:bg>
       <p:bgPr>
@@ -3875,7 +3891,14 @@
         <p:cNvGrpSpPr/>
         <p:nvPr/>
       </p:nvGrpSpPr>
-      <p:grpSpPr/>
+      <p:grpSpPr>
+        <a:xfrm>
+          <a:off x="0" y="0"/>
+          <a:ext cx="0" cy="0"/>
+          <a:chOff x="0" y="0"/>
+          <a:chExt cx="0" cy="0"/>
+        </a:xfrm>
+      </p:grpSpPr>
       <p:sp>
         <p:nvSpPr>
           <p:cNvPr id="2" name="Rectangle 1"/>
@@ -3916,6 +3939,7 @@
           <a:lstStyle/>
           <a:p>
             <a:pPr algn="ctr"/>
+            <a:endParaRPr/>
           </a:p>
         </p:txBody>
       </p:sp>
@@ -4255,7 +4279,7 @@
 </file>
 
 <file path=ppt/slides/slide12.xml><?xml version="1.0" encoding="utf-8"?>
-<p:sld xmlns:a="http://schemas.openxmlformats.org/drawingml/2006/main" xmlns:p="http://schemas.openxmlformats.org/presentationml/2006/main" xmlns:r="http://schemas.openxmlformats.org/officeDocument/2006/relationships">
+<p:sld xmlns:a="http://schemas.openxmlformats.org/drawingml/2006/main" xmlns:r="http://schemas.openxmlformats.org/officeDocument/2006/relationships" xmlns:p="http://schemas.openxmlformats.org/presentationml/2006/main">
   <p:cSld>
     <p:bg>
       <p:bgPr>
@@ -4271,7 +4295,14 @@
         <p:cNvGrpSpPr/>
         <p:nvPr/>
       </p:nvGrpSpPr>
-      <p:grpSpPr/>
+      <p:grpSpPr>
+        <a:xfrm>
+          <a:off x="0" y="0"/>
+          <a:ext cx="0" cy="0"/>
+          <a:chOff x="0" y="0"/>
+          <a:chExt cx="0" cy="0"/>
+        </a:xfrm>
+      </p:grpSpPr>
       <p:sp>
         <p:nvSpPr>
           <p:cNvPr id="2" name="Rectangle 1"/>
@@ -4312,6 +4343,7 @@
           <a:lstStyle/>
           <a:p>
             <a:pPr algn="ctr"/>
+            <a:endParaRPr/>
           </a:p>
         </p:txBody>
       </p:sp>
@@ -4528,7 +4560,7 @@
 </file>
 
 <file path=ppt/slides/slide13.xml><?xml version="1.0" encoding="utf-8"?>
-<p:sld xmlns:a="http://schemas.openxmlformats.org/drawingml/2006/main" xmlns:p="http://schemas.openxmlformats.org/presentationml/2006/main" xmlns:r="http://schemas.openxmlformats.org/officeDocument/2006/relationships">
+<p:sld xmlns:a="http://schemas.openxmlformats.org/drawingml/2006/main" xmlns:r="http://schemas.openxmlformats.org/officeDocument/2006/relationships" xmlns:p="http://schemas.openxmlformats.org/presentationml/2006/main">
   <p:cSld>
     <p:bg>
       <p:bgPr>
@@ -4544,7 +4576,14 @@
         <p:cNvGrpSpPr/>
         <p:nvPr/>
       </p:nvGrpSpPr>
-      <p:grpSpPr/>
+      <p:grpSpPr>
+        <a:xfrm>
+          <a:off x="0" y="0"/>
+          <a:ext cx="0" cy="0"/>
+          <a:chOff x="0" y="0"/>
+          <a:chExt cx="0" cy="0"/>
+        </a:xfrm>
+      </p:grpSpPr>
       <p:sp>
         <p:nvSpPr>
           <p:cNvPr id="2" name="Rectangle 1"/>
@@ -4585,6 +4624,7 @@
           <a:lstStyle/>
           <a:p>
             <a:pPr algn="ctr"/>
+            <a:endParaRPr/>
           </a:p>
         </p:txBody>
       </p:sp>
@@ -4765,7 +4805,7 @@
 </file>
 
 <file path=ppt/slides/slide14.xml><?xml version="1.0" encoding="utf-8"?>
-<p:sld xmlns:a="http://schemas.openxmlformats.org/drawingml/2006/main" xmlns:p="http://schemas.openxmlformats.org/presentationml/2006/main" xmlns:r="http://schemas.openxmlformats.org/officeDocument/2006/relationships">
+<p:sld xmlns:a="http://schemas.openxmlformats.org/drawingml/2006/main" xmlns:r="http://schemas.openxmlformats.org/officeDocument/2006/relationships" xmlns:p="http://schemas.openxmlformats.org/presentationml/2006/main">
   <p:cSld>
     <p:bg>
       <p:bgPr>
@@ -4781,7 +4821,14 @@
         <p:cNvGrpSpPr/>
         <p:nvPr/>
       </p:nvGrpSpPr>
-      <p:grpSpPr/>
+      <p:grpSpPr>
+        <a:xfrm>
+          <a:off x="0" y="0"/>
+          <a:ext cx="0" cy="0"/>
+          <a:chOff x="0" y="0"/>
+          <a:chExt cx="0" cy="0"/>
+        </a:xfrm>
+      </p:grpSpPr>
       <p:sp>
         <p:nvSpPr>
           <p:cNvPr id="2" name="Rectangle 1"/>
@@ -4822,6 +4869,7 @@
           <a:lstStyle/>
           <a:p>
             <a:pPr algn="ctr"/>
+            <a:endParaRPr/>
           </a:p>
         </p:txBody>
       </p:sp>
@@ -5002,7 +5050,7 @@
 </file>
 
 <file path=ppt/slides/slide15.xml><?xml version="1.0" encoding="utf-8"?>
-<p:sld xmlns:a="http://schemas.openxmlformats.org/drawingml/2006/main" xmlns:p="http://schemas.openxmlformats.org/presentationml/2006/main" xmlns:r="http://schemas.openxmlformats.org/officeDocument/2006/relationships">
+<p:sld xmlns:a="http://schemas.openxmlformats.org/drawingml/2006/main" xmlns:r="http://schemas.openxmlformats.org/officeDocument/2006/relationships" xmlns:p="http://schemas.openxmlformats.org/presentationml/2006/main">
   <p:cSld>
     <p:bg>
       <p:bgPr>
@@ -5018,7 +5066,14 @@
         <p:cNvGrpSpPr/>
         <p:nvPr/>
       </p:nvGrpSpPr>
-      <p:grpSpPr/>
+      <p:grpSpPr>
+        <a:xfrm>
+          <a:off x="0" y="0"/>
+          <a:ext cx="0" cy="0"/>
+          <a:chOff x="0" y="0"/>
+          <a:chExt cx="0" cy="0"/>
+        </a:xfrm>
+      </p:grpSpPr>
       <p:sp>
         <p:nvSpPr>
           <p:cNvPr id="2" name="Rectangle 1"/>
@@ -5059,6 +5114,7 @@
           <a:lstStyle/>
           <a:p>
             <a:pPr algn="ctr"/>
+            <a:endParaRPr/>
           </a:p>
         </p:txBody>
       </p:sp>
@@ -5275,7 +5331,7 @@
 </file>
 
 <file path=ppt/slides/slide16.xml><?xml version="1.0" encoding="utf-8"?>
-<p:sld xmlns:a="http://schemas.openxmlformats.org/drawingml/2006/main" xmlns:p="http://schemas.openxmlformats.org/presentationml/2006/main" xmlns:r="http://schemas.openxmlformats.org/officeDocument/2006/relationships">
+<p:sld xmlns:a="http://schemas.openxmlformats.org/drawingml/2006/main" xmlns:r="http://schemas.openxmlformats.org/officeDocument/2006/relationships" xmlns:p="http://schemas.openxmlformats.org/presentationml/2006/main">
   <p:cSld>
     <p:bg>
       <p:bgPr>
@@ -5291,7 +5347,14 @@
         <p:cNvGrpSpPr/>
         <p:nvPr/>
       </p:nvGrpSpPr>
-      <p:grpSpPr/>
+      <p:grpSpPr>
+        <a:xfrm>
+          <a:off x="0" y="0"/>
+          <a:ext cx="0" cy="0"/>
+          <a:chOff x="0" y="0"/>
+          <a:chExt cx="0" cy="0"/>
+        </a:xfrm>
+      </p:grpSpPr>
       <p:sp>
         <p:nvSpPr>
           <p:cNvPr id="2" name="Rectangle 1"/>
@@ -5332,6 +5395,7 @@
           <a:lstStyle/>
           <a:p>
             <a:pPr algn="ctr"/>
+            <a:endParaRPr/>
           </a:p>
         </p:txBody>
       </p:sp>
@@ -5591,7 +5655,7 @@
 </file>
 
 <file path=ppt/slides/slide17.xml><?xml version="1.0" encoding="utf-8"?>
-<p:sld xmlns:a="http://schemas.openxmlformats.org/drawingml/2006/main" xmlns:p="http://schemas.openxmlformats.org/presentationml/2006/main" xmlns:r="http://schemas.openxmlformats.org/officeDocument/2006/relationships">
+<p:sld xmlns:a="http://schemas.openxmlformats.org/drawingml/2006/main" xmlns:r="http://schemas.openxmlformats.org/officeDocument/2006/relationships" xmlns:p="http://schemas.openxmlformats.org/presentationml/2006/main">
   <p:cSld>
     <p:bg>
       <p:bgPr>
@@ -5607,7 +5671,14 @@
         <p:cNvGrpSpPr/>
         <p:nvPr/>
       </p:nvGrpSpPr>
-      <p:grpSpPr/>
+      <p:grpSpPr>
+        <a:xfrm>
+          <a:off x="0" y="0"/>
+          <a:ext cx="0" cy="0"/>
+          <a:chOff x="0" y="0"/>
+          <a:chExt cx="0" cy="0"/>
+        </a:xfrm>
+      </p:grpSpPr>
       <p:sp>
         <p:nvSpPr>
           <p:cNvPr id="2" name="Rectangle 1"/>
@@ -5648,6 +5719,7 @@
           <a:lstStyle/>
           <a:p>
             <a:pPr algn="ctr"/>
+            <a:endParaRPr/>
           </a:p>
         </p:txBody>
       </p:sp>
@@ -5731,7 +5803,7 @@
         </p:nvSpPr>
         <p:spPr>
           <a:xfrm>
-            <a:off x="731520" y="2103120"/>
+            <a:off x="731520" y="1783080"/>
             <a:ext cx="10515600" cy="365760"/>
           </a:xfrm>
           <a:prstGeom prst="rect">
@@ -5767,7 +5839,7 @@
         </p:nvSpPr>
         <p:spPr>
           <a:xfrm>
-            <a:off x="731520" y="2560320"/>
+            <a:off x="731520" y="2148840"/>
             <a:ext cx="10515600" cy="2011680"/>
           </a:xfrm>
           <a:prstGeom prst="rect">
@@ -5790,6 +5862,7 @@
               </a:defRPr>
             </a:pPr>
             <a:r>
+              <a:rPr dirty="0"/>
               <a:t>Eight real mechanics from platforms young people actually use appear on screen one at a time. For each, vote: MOTIVATION (serves the user's goal) or MANIPULATION (serves the platform)? No middle option. The blurry votes are the real discussion.</a:t>
             </a:r>
           </a:p>
@@ -5803,7 +5876,7 @@
         </p:nvSpPr>
         <p:spPr>
           <a:xfrm>
-            <a:off x="731520" y="4663440"/>
+            <a:off x="731520" y="3268980"/>
             <a:ext cx="10515600" cy="320040"/>
           </a:xfrm>
           <a:prstGeom prst="rect">
@@ -5839,7 +5912,7 @@
         </p:nvSpPr>
         <p:spPr>
           <a:xfrm>
-            <a:off x="731520" y="4983480"/>
+            <a:off x="731520" y="3589020"/>
             <a:ext cx="10515600" cy="2103120"/>
           </a:xfrm>
           <a:prstGeom prst="rect">
@@ -5865,6 +5938,7 @@
               </a:defRPr>
             </a:pPr>
             <a:r>
+              <a:rPr dirty="0"/>
               <a:t>•  Duolingo: a guilt notification if you miss a day</a:t>
             </a:r>
           </a:p>
@@ -5881,6 +5955,7 @@
               </a:defRPr>
             </a:pPr>
             <a:r>
+              <a:rPr dirty="0"/>
               <a:t>•  YouTube: autoplay next video without asking</a:t>
             </a:r>
           </a:p>
@@ -5897,6 +5972,7 @@
               </a:defRPr>
             </a:pPr>
             <a:r>
+              <a:rPr dirty="0"/>
               <a:t>•  Kahoot: leaderboard showing top 5</a:t>
             </a:r>
           </a:p>
@@ -5913,6 +5989,7 @@
               </a:defRPr>
             </a:pPr>
             <a:r>
+              <a:rPr dirty="0"/>
               <a:t>•  Discord: role badges for active community members</a:t>
             </a:r>
           </a:p>
@@ -5929,6 +6006,7 @@
               </a:defRPr>
             </a:pPr>
             <a:r>
+              <a:rPr dirty="0"/>
               <a:t>•  TikTok: 'People you may know' using your contacts</a:t>
             </a:r>
           </a:p>
@@ -5945,6 +6023,7 @@
               </a:defRPr>
             </a:pPr>
             <a:r>
+              <a:rPr dirty="0"/>
               <a:t>•  Snapchat: streaks that break if you miss a day</a:t>
             </a:r>
           </a:p>
@@ -5961,6 +6040,7 @@
               </a:defRPr>
             </a:pPr>
             <a:r>
+              <a:rPr dirty="0"/>
               <a:t>•  Instagram: hiding like counts (added in 2019)</a:t>
             </a:r>
           </a:p>
@@ -5977,6 +6057,7 @@
               </a:defRPr>
             </a:pPr>
             <a:r>
+              <a:rPr dirty="0"/>
               <a:t>•  BeReal: you only have 2 minutes once a day to post</a:t>
             </a:r>
           </a:p>
@@ -6051,7 +6132,7 @@
 </file>
 
 <file path=ppt/slides/slide18.xml><?xml version="1.0" encoding="utf-8"?>
-<p:sld xmlns:a="http://schemas.openxmlformats.org/drawingml/2006/main" xmlns:p="http://schemas.openxmlformats.org/presentationml/2006/main" xmlns:r="http://schemas.openxmlformats.org/officeDocument/2006/relationships">
+<p:sld xmlns:a="http://schemas.openxmlformats.org/drawingml/2006/main" xmlns:r="http://schemas.openxmlformats.org/officeDocument/2006/relationships" xmlns:p="http://schemas.openxmlformats.org/presentationml/2006/main">
   <p:cSld>
     <p:bg>
       <p:bgPr>
@@ -6067,7 +6148,14 @@
         <p:cNvGrpSpPr/>
         <p:nvPr/>
       </p:nvGrpSpPr>
-      <p:grpSpPr/>
+      <p:grpSpPr>
+        <a:xfrm>
+          <a:off x="0" y="0"/>
+          <a:ext cx="0" cy="0"/>
+          <a:chOff x="0" y="0"/>
+          <a:chExt cx="0" cy="0"/>
+        </a:xfrm>
+      </p:grpSpPr>
       <p:sp>
         <p:nvSpPr>
           <p:cNvPr id="2" name="Rectangle 1"/>
@@ -6108,6 +6196,7 @@
           <a:lstStyle/>
           <a:p>
             <a:pPr algn="ctr"/>
+            <a:endParaRPr/>
           </a:p>
         </p:txBody>
       </p:sp>
@@ -6263,7 +6352,7 @@
         </p:nvSpPr>
         <p:spPr>
           <a:xfrm>
-            <a:off x="731520" y="4663440"/>
+            <a:off x="731520" y="3520440"/>
             <a:ext cx="10515600" cy="320040"/>
           </a:xfrm>
           <a:prstGeom prst="rect">
@@ -6299,7 +6388,7 @@
         </p:nvSpPr>
         <p:spPr>
           <a:xfrm>
-            <a:off x="731520" y="4983480"/>
+            <a:off x="731520" y="3840480"/>
             <a:ext cx="10515600" cy="2103120"/>
           </a:xfrm>
           <a:prstGeom prst="rect">
@@ -6479,7 +6568,7 @@
 </file>
 
 <file path=ppt/slides/slide19.xml><?xml version="1.0" encoding="utf-8"?>
-<p:sld xmlns:a="http://schemas.openxmlformats.org/drawingml/2006/main" xmlns:p="http://schemas.openxmlformats.org/presentationml/2006/main" xmlns:r="http://schemas.openxmlformats.org/officeDocument/2006/relationships">
+<p:sld xmlns:a="http://schemas.openxmlformats.org/drawingml/2006/main" xmlns:r="http://schemas.openxmlformats.org/officeDocument/2006/relationships" xmlns:p="http://schemas.openxmlformats.org/presentationml/2006/main">
   <p:cSld>
     <p:bg>
       <p:bgPr>
@@ -6495,7 +6584,14 @@
         <p:cNvGrpSpPr/>
         <p:nvPr/>
       </p:nvGrpSpPr>
-      <p:grpSpPr/>
+      <p:grpSpPr>
+        <a:xfrm>
+          <a:off x="0" y="0"/>
+          <a:ext cx="0" cy="0"/>
+          <a:chOff x="0" y="0"/>
+          <a:chExt cx="0" cy="0"/>
+        </a:xfrm>
+      </p:grpSpPr>
       <p:sp>
         <p:nvSpPr>
           <p:cNvPr id="2" name="Rectangle 1"/>
@@ -6536,6 +6632,7 @@
           <a:lstStyle/>
           <a:p>
             <a:pPr algn="ctr"/>
+            <a:endParaRPr/>
           </a:p>
         </p:txBody>
       </p:sp>
@@ -6716,7 +6813,7 @@
 </file>
 
 <file path=ppt/slides/slide2.xml><?xml version="1.0" encoding="utf-8"?>
-<p:sld xmlns:a="http://schemas.openxmlformats.org/drawingml/2006/main" xmlns:p="http://schemas.openxmlformats.org/presentationml/2006/main" xmlns:r="http://schemas.openxmlformats.org/officeDocument/2006/relationships">
+<p:sld xmlns:a="http://schemas.openxmlformats.org/drawingml/2006/main" xmlns:r="http://schemas.openxmlformats.org/officeDocument/2006/relationships" xmlns:p="http://schemas.openxmlformats.org/presentationml/2006/main">
   <p:cSld>
     <p:bg>
       <p:bgPr>
@@ -6732,7 +6829,14 @@
         <p:cNvGrpSpPr/>
         <p:nvPr/>
       </p:nvGrpSpPr>
-      <p:grpSpPr/>
+      <p:grpSpPr>
+        <a:xfrm>
+          <a:off x="0" y="0"/>
+          <a:ext cx="0" cy="0"/>
+          <a:chOff x="0" y="0"/>
+          <a:chExt cx="0" cy="0"/>
+        </a:xfrm>
+      </p:grpSpPr>
       <p:sp>
         <p:nvSpPr>
           <p:cNvPr id="2" name="Rectangle 1"/>
@@ -6773,6 +6877,7 @@
           <a:lstStyle/>
           <a:p>
             <a:pPr algn="ctr"/>
+            <a:endParaRPr/>
           </a:p>
         </p:txBody>
       </p:sp>
@@ -6816,6 +6921,7 @@
           <a:lstStyle/>
           <a:p>
             <a:pPr algn="ctr"/>
+            <a:endParaRPr/>
           </a:p>
         </p:txBody>
       </p:sp>
@@ -6859,6 +6965,7 @@
           <a:lstStyle/>
           <a:p>
             <a:pPr algn="ctr"/>
+            <a:endParaRPr/>
           </a:p>
         </p:txBody>
       </p:sp>
@@ -7174,7 +7281,7 @@
 </file>
 
 <file path=ppt/slides/slide20.xml><?xml version="1.0" encoding="utf-8"?>
-<p:sld xmlns:a="http://schemas.openxmlformats.org/drawingml/2006/main" xmlns:p="http://schemas.openxmlformats.org/presentationml/2006/main" xmlns:r="http://schemas.openxmlformats.org/officeDocument/2006/relationships">
+<p:sld xmlns:a="http://schemas.openxmlformats.org/drawingml/2006/main" xmlns:r="http://schemas.openxmlformats.org/officeDocument/2006/relationships" xmlns:p="http://schemas.openxmlformats.org/presentationml/2006/main">
   <p:cSld>
     <p:bg>
       <p:bgPr>
@@ -7190,7 +7297,14 @@
         <p:cNvGrpSpPr/>
         <p:nvPr/>
       </p:nvGrpSpPr>
-      <p:grpSpPr/>
+      <p:grpSpPr>
+        <a:xfrm>
+          <a:off x="0" y="0"/>
+          <a:ext cx="0" cy="0"/>
+          <a:chOff x="0" y="0"/>
+          <a:chExt cx="0" cy="0"/>
+        </a:xfrm>
+      </p:grpSpPr>
       <p:sp>
         <p:nvSpPr>
           <p:cNvPr id="2" name="Rectangle 1"/>
@@ -7231,6 +7345,7 @@
           <a:lstStyle/>
           <a:p>
             <a:pPr algn="ctr"/>
+            <a:endParaRPr/>
           </a:p>
         </p:txBody>
       </p:sp>
@@ -7411,7 +7526,7 @@
 </file>
 
 <file path=ppt/slides/slide21.xml><?xml version="1.0" encoding="utf-8"?>
-<p:sld xmlns:a="http://schemas.openxmlformats.org/drawingml/2006/main" xmlns:p="http://schemas.openxmlformats.org/presentationml/2006/main" xmlns:r="http://schemas.openxmlformats.org/officeDocument/2006/relationships">
+<p:sld xmlns:a="http://schemas.openxmlformats.org/drawingml/2006/main" xmlns:r="http://schemas.openxmlformats.org/officeDocument/2006/relationships" xmlns:p="http://schemas.openxmlformats.org/presentationml/2006/main">
   <p:cSld>
     <p:bg>
       <p:bgPr>
@@ -7427,7 +7542,14 @@
         <p:cNvGrpSpPr/>
         <p:nvPr/>
       </p:nvGrpSpPr>
-      <p:grpSpPr/>
+      <p:grpSpPr>
+        <a:xfrm>
+          <a:off x="0" y="0"/>
+          <a:ext cx="0" cy="0"/>
+          <a:chOff x="0" y="0"/>
+          <a:chExt cx="0" cy="0"/>
+        </a:xfrm>
+      </p:grpSpPr>
       <p:sp>
         <p:nvSpPr>
           <p:cNvPr id="2" name="Rectangle 1"/>
@@ -7468,6 +7590,7 @@
           <a:lstStyle/>
           <a:p>
             <a:pPr algn="ctr"/>
+            <a:endParaRPr/>
           </a:p>
         </p:txBody>
       </p:sp>
@@ -7763,7 +7886,7 @@
 </file>
 
 <file path=ppt/slides/slide22.xml><?xml version="1.0" encoding="utf-8"?>
-<p:sld xmlns:a="http://schemas.openxmlformats.org/drawingml/2006/main" xmlns:p="http://schemas.openxmlformats.org/presentationml/2006/main" xmlns:r="http://schemas.openxmlformats.org/officeDocument/2006/relationships">
+<p:sld xmlns:a="http://schemas.openxmlformats.org/drawingml/2006/main" xmlns:r="http://schemas.openxmlformats.org/officeDocument/2006/relationships" xmlns:p="http://schemas.openxmlformats.org/presentationml/2006/main">
   <p:cSld>
     <p:bg>
       <p:bgPr>
@@ -7779,7 +7902,14 @@
         <p:cNvGrpSpPr/>
         <p:nvPr/>
       </p:nvGrpSpPr>
-      <p:grpSpPr/>
+      <p:grpSpPr>
+        <a:xfrm>
+          <a:off x="0" y="0"/>
+          <a:ext cx="0" cy="0"/>
+          <a:chOff x="0" y="0"/>
+          <a:chExt cx="0" cy="0"/>
+        </a:xfrm>
+      </p:grpSpPr>
       <p:sp>
         <p:nvSpPr>
           <p:cNvPr id="2" name="Rectangle 1"/>
@@ -7820,6 +7950,7 @@
           <a:lstStyle/>
           <a:p>
             <a:pPr algn="ctr"/>
+            <a:endParaRPr/>
           </a:p>
         </p:txBody>
       </p:sp>
@@ -8000,7 +8131,7 @@
 </file>
 
 <file path=ppt/slides/slide23.xml><?xml version="1.0" encoding="utf-8"?>
-<p:sld xmlns:a="http://schemas.openxmlformats.org/drawingml/2006/main" xmlns:p="http://schemas.openxmlformats.org/presentationml/2006/main" xmlns:r="http://schemas.openxmlformats.org/officeDocument/2006/relationships">
+<p:sld xmlns:a="http://schemas.openxmlformats.org/drawingml/2006/main" xmlns:r="http://schemas.openxmlformats.org/officeDocument/2006/relationships" xmlns:p="http://schemas.openxmlformats.org/presentationml/2006/main">
   <p:cSld>
     <p:bg>
       <p:bgPr>
@@ -8016,7 +8147,14 @@
         <p:cNvGrpSpPr/>
         <p:nvPr/>
       </p:nvGrpSpPr>
-      <p:grpSpPr/>
+      <p:grpSpPr>
+        <a:xfrm>
+          <a:off x="0" y="0"/>
+          <a:ext cx="0" cy="0"/>
+          <a:chOff x="0" y="0"/>
+          <a:chExt cx="0" cy="0"/>
+        </a:xfrm>
+      </p:grpSpPr>
       <p:sp>
         <p:nvSpPr>
           <p:cNvPr id="2" name="Rectangle 1"/>
@@ -8057,6 +8195,7 @@
           <a:lstStyle/>
           <a:p>
             <a:pPr algn="ctr"/>
+            <a:endParaRPr/>
           </a:p>
         </p:txBody>
       </p:sp>
@@ -8140,7 +8279,7 @@
         </p:nvSpPr>
         <p:spPr>
           <a:xfrm>
-            <a:off x="731520" y="2103120"/>
+            <a:off x="731520" y="1600200"/>
             <a:ext cx="10515600" cy="365760"/>
           </a:xfrm>
           <a:prstGeom prst="rect">
@@ -8176,7 +8315,7 @@
         </p:nvSpPr>
         <p:spPr>
           <a:xfrm>
-            <a:off x="731520" y="2560320"/>
+            <a:off x="731520" y="2057400"/>
             <a:ext cx="10515600" cy="2011680"/>
           </a:xfrm>
           <a:prstGeom prst="rect">
@@ -8212,7 +8351,7 @@
         </p:nvSpPr>
         <p:spPr>
           <a:xfrm>
-            <a:off x="731520" y="4663440"/>
+            <a:off x="731520" y="2926080"/>
             <a:ext cx="10515600" cy="320040"/>
           </a:xfrm>
           <a:prstGeom prst="rect">
@@ -8248,7 +8387,7 @@
         </p:nvSpPr>
         <p:spPr>
           <a:xfrm>
-            <a:off x="731520" y="4983480"/>
+            <a:off x="731520" y="3246120"/>
             <a:ext cx="10515600" cy="2103120"/>
           </a:xfrm>
           <a:prstGeom prst="rect">
@@ -8274,6 +8413,7 @@
               </a:defRPr>
             </a:pPr>
             <a:r>
+              <a:rPr dirty="0"/>
               <a:t>•  Leaderboards with real names</a:t>
             </a:r>
           </a:p>
@@ -8290,6 +8430,7 @@
               </a:defRPr>
             </a:pPr>
             <a:r>
+              <a:rPr dirty="0"/>
               <a:t>•  Streaks that break if you miss a day</a:t>
             </a:r>
           </a:p>
@@ -8306,6 +8447,7 @@
               </a:defRPr>
             </a:pPr>
             <a:r>
+              <a:rPr dirty="0"/>
               <a:t>•  Badges for completion</a:t>
             </a:r>
           </a:p>
@@ -8322,6 +8464,7 @@
               </a:defRPr>
             </a:pPr>
             <a:r>
+              <a:rPr dirty="0"/>
               <a:t>•  Anonymous reactions</a:t>
             </a:r>
           </a:p>
@@ -8338,6 +8481,7 @@
               </a:defRPr>
             </a:pPr>
             <a:r>
+              <a:rPr dirty="0"/>
               <a:t>•  Public like/heart counts</a:t>
             </a:r>
           </a:p>
@@ -8354,6 +8498,7 @@
               </a:defRPr>
             </a:pPr>
             <a:r>
+              <a:rPr dirty="0"/>
               <a:t>•  Time-pressure countdowns</a:t>
             </a:r>
           </a:p>
@@ -8370,6 +8515,7 @@
               </a:defRPr>
             </a:pPr>
             <a:r>
+              <a:rPr dirty="0"/>
               <a:t>•  Peer voting on submissions</a:t>
             </a:r>
           </a:p>
@@ -8386,6 +8532,7 @@
               </a:defRPr>
             </a:pPr>
             <a:r>
+              <a:rPr dirty="0"/>
               <a:t>•  Push notifications outside of session hours</a:t>
             </a:r>
           </a:p>
@@ -8402,6 +8549,7 @@
               </a:defRPr>
             </a:pPr>
             <a:r>
+              <a:rPr dirty="0"/>
               <a:t>•  Requiring real names</a:t>
             </a:r>
           </a:p>
@@ -8418,6 +8566,7 @@
               </a:defRPr>
             </a:pPr>
             <a:r>
+              <a:rPr dirty="0"/>
               <a:t>•  Showing session time spent</a:t>
             </a:r>
           </a:p>
@@ -8492,7 +8641,7 @@
 </file>
 
 <file path=ppt/slides/slide24.xml><?xml version="1.0" encoding="utf-8"?>
-<p:sld xmlns:a="http://schemas.openxmlformats.org/drawingml/2006/main" xmlns:p="http://schemas.openxmlformats.org/presentationml/2006/main" xmlns:r="http://schemas.openxmlformats.org/officeDocument/2006/relationships">
+<p:sld xmlns:a="http://schemas.openxmlformats.org/drawingml/2006/main" xmlns:r="http://schemas.openxmlformats.org/officeDocument/2006/relationships" xmlns:p="http://schemas.openxmlformats.org/presentationml/2006/main">
   <p:cSld>
     <p:bg>
       <p:bgPr>
@@ -8508,7 +8657,14 @@
         <p:cNvGrpSpPr/>
         <p:nvPr/>
       </p:nvGrpSpPr>
-      <p:grpSpPr/>
+      <p:grpSpPr>
+        <a:xfrm>
+          <a:off x="0" y="0"/>
+          <a:ext cx="0" cy="0"/>
+          <a:chOff x="0" y="0"/>
+          <a:chExt cx="0" cy="0"/>
+        </a:xfrm>
+      </p:grpSpPr>
       <p:sp>
         <p:nvSpPr>
           <p:cNvPr id="2" name="Rectangle 1"/>
@@ -8549,6 +8705,7 @@
           <a:lstStyle/>
           <a:p>
             <a:pPr algn="ctr"/>
+            <a:endParaRPr/>
           </a:p>
         </p:txBody>
       </p:sp>
@@ -8632,7 +8789,7 @@
         </p:nvSpPr>
         <p:spPr>
           <a:xfrm>
-            <a:off x="731520" y="2103120"/>
+            <a:off x="731520" y="1769942"/>
             <a:ext cx="10515600" cy="2011680"/>
           </a:xfrm>
           <a:prstGeom prst="rect">
@@ -8655,6 +8812,7 @@
               </a:defRPr>
             </a:pPr>
             <a:r>
+              <a:rPr dirty="0"/>
               <a:t>4 chairs in the middle of the room. Volunteers sit and discuss. Anyone can tap a shoulder to swap in. Everyone else listens in silence. Use the primers to get going — pick whichever hits hardest, or move through them as the conversation opens up.</a:t>
             </a:r>
           </a:p>
@@ -8668,7 +8826,7 @@
         </p:nvSpPr>
         <p:spPr>
           <a:xfrm>
-            <a:off x="731520" y="4206240"/>
+            <a:off x="731520" y="2984938"/>
             <a:ext cx="10515600" cy="320040"/>
           </a:xfrm>
           <a:prstGeom prst="rect">
@@ -8704,7 +8862,7 @@
         </p:nvSpPr>
         <p:spPr>
           <a:xfrm>
-            <a:off x="731520" y="4526280"/>
+            <a:off x="731520" y="3304978"/>
             <a:ext cx="10515600" cy="2103120"/>
           </a:xfrm>
           <a:prstGeom prst="rect">
@@ -8730,6 +8888,7 @@
               </a:defRPr>
             </a:pPr>
             <a:r>
+              <a:rPr dirty="0"/>
               <a:t>•  Should the UK copy Australia's under-16 social media ban? What do young people gain? What do they lose?</a:t>
             </a:r>
           </a:p>
@@ -8746,6 +8905,7 @@
               </a:defRPr>
             </a:pPr>
             <a:r>
+              <a:rPr dirty="0"/>
               <a:t>•  If under-16s are legally banned from social media, what happens to LGBTQ+ young people finding community online? Care-experienced young people? Young carers?</a:t>
             </a:r>
           </a:p>
@@ -8762,6 +8922,7 @@
               </a:defRPr>
             </a:pPr>
             <a:r>
+              <a:rPr dirty="0"/>
               <a:t>•  Are we legislating because we can't parent, or because platforms won't change?</a:t>
             </a:r>
           </a:p>
@@ -8778,6 +8939,7 @@
               </a:defRPr>
             </a:pPr>
             <a:r>
+              <a:rPr dirty="0"/>
               <a:t>•  Whose responsibility is it when a platform harms a young person — the platform, the parent, the school, the youth worker, or the law?</a:t>
             </a:r>
           </a:p>
@@ -8794,6 +8956,7 @@
               </a:defRPr>
             </a:pPr>
             <a:r>
+              <a:rPr dirty="0"/>
               <a:t>•  Would you support a ban even if you knew some young people would lose their safest space?</a:t>
             </a:r>
           </a:p>
@@ -8810,6 +8973,7 @@
               </a:defRPr>
             </a:pPr>
             <a:r>
+              <a:rPr dirty="0"/>
               <a:t>•  If age verification becomes mandatory, where does the data go — and do you trust that chain?</a:t>
             </a:r>
           </a:p>
@@ -8884,7 +9048,7 @@
 </file>
 
 <file path=ppt/slides/slide25.xml><?xml version="1.0" encoding="utf-8"?>
-<p:sld xmlns:a="http://schemas.openxmlformats.org/drawingml/2006/main" xmlns:p="http://schemas.openxmlformats.org/presentationml/2006/main" xmlns:r="http://schemas.openxmlformats.org/officeDocument/2006/relationships">
+<p:sld xmlns:a="http://schemas.openxmlformats.org/drawingml/2006/main" xmlns:r="http://schemas.openxmlformats.org/officeDocument/2006/relationships" xmlns:p="http://schemas.openxmlformats.org/presentationml/2006/main">
   <p:cSld>
     <p:bg>
       <p:bgPr>
@@ -8900,7 +9064,14 @@
         <p:cNvGrpSpPr/>
         <p:nvPr/>
       </p:nvGrpSpPr>
-      <p:grpSpPr/>
+      <p:grpSpPr>
+        <a:xfrm>
+          <a:off x="0" y="0"/>
+          <a:ext cx="0" cy="0"/>
+          <a:chOff x="0" y="0"/>
+          <a:chExt cx="0" cy="0"/>
+        </a:xfrm>
+      </p:grpSpPr>
       <p:sp>
         <p:nvSpPr>
           <p:cNvPr id="2" name="Rectangle 1"/>
@@ -8941,6 +9112,7 @@
           <a:lstStyle/>
           <a:p>
             <a:pPr algn="ctr"/>
+            <a:endParaRPr/>
           </a:p>
         </p:txBody>
       </p:sp>
@@ -9157,7 +9329,7 @@
 </file>
 
 <file path=ppt/slides/slide26.xml><?xml version="1.0" encoding="utf-8"?>
-<p:sld xmlns:a="http://schemas.openxmlformats.org/drawingml/2006/main" xmlns:p="http://schemas.openxmlformats.org/presentationml/2006/main" xmlns:r="http://schemas.openxmlformats.org/officeDocument/2006/relationships">
+<p:sld xmlns:a="http://schemas.openxmlformats.org/drawingml/2006/main" xmlns:r="http://schemas.openxmlformats.org/officeDocument/2006/relationships" xmlns:p="http://schemas.openxmlformats.org/presentationml/2006/main">
   <p:cSld>
     <p:bg>
       <p:bgPr>
@@ -9173,7 +9345,14 @@
         <p:cNvGrpSpPr/>
         <p:nvPr/>
       </p:nvGrpSpPr>
-      <p:grpSpPr/>
+      <p:grpSpPr>
+        <a:xfrm>
+          <a:off x="0" y="0"/>
+          <a:ext cx="0" cy="0"/>
+          <a:chOff x="0" y="0"/>
+          <a:chExt cx="0" cy="0"/>
+        </a:xfrm>
+      </p:grpSpPr>
       <p:sp>
         <p:nvSpPr>
           <p:cNvPr id="2" name="Rectangle 1"/>
@@ -9214,6 +9393,7 @@
           <a:lstStyle/>
           <a:p>
             <a:pPr algn="ctr"/>
+            <a:endParaRPr/>
           </a:p>
         </p:txBody>
       </p:sp>
@@ -9394,7 +9574,7 @@
 </file>
 
 <file path=ppt/slides/slide27.xml><?xml version="1.0" encoding="utf-8"?>
-<p:sld xmlns:a="http://schemas.openxmlformats.org/drawingml/2006/main" xmlns:p="http://schemas.openxmlformats.org/presentationml/2006/main" xmlns:r="http://schemas.openxmlformats.org/officeDocument/2006/relationships">
+<p:sld xmlns:a="http://schemas.openxmlformats.org/drawingml/2006/main" xmlns:r="http://schemas.openxmlformats.org/officeDocument/2006/relationships" xmlns:p="http://schemas.openxmlformats.org/presentationml/2006/main">
   <p:cSld>
     <p:bg>
       <p:bgPr>
@@ -9410,7 +9590,14 @@
         <p:cNvGrpSpPr/>
         <p:nvPr/>
       </p:nvGrpSpPr>
-      <p:grpSpPr/>
+      <p:grpSpPr>
+        <a:xfrm>
+          <a:off x="0" y="0"/>
+          <a:ext cx="0" cy="0"/>
+          <a:chOff x="0" y="0"/>
+          <a:chExt cx="0" cy="0"/>
+        </a:xfrm>
+      </p:grpSpPr>
       <p:sp>
         <p:nvSpPr>
           <p:cNvPr id="2" name="Rectangle 1"/>
@@ -9451,6 +9638,7 @@
           <a:lstStyle/>
           <a:p>
             <a:pPr algn="ctr"/>
+            <a:endParaRPr/>
           </a:p>
         </p:txBody>
       </p:sp>
@@ -9643,7 +9831,7 @@
 </file>
 
 <file path=ppt/slides/slide28.xml><?xml version="1.0" encoding="utf-8"?>
-<p:sld xmlns:a="http://schemas.openxmlformats.org/drawingml/2006/main" xmlns:p="http://schemas.openxmlformats.org/presentationml/2006/main" xmlns:r="http://schemas.openxmlformats.org/officeDocument/2006/relationships">
+<p:sld xmlns:a="http://schemas.openxmlformats.org/drawingml/2006/main" xmlns:r="http://schemas.openxmlformats.org/officeDocument/2006/relationships" xmlns:p="http://schemas.openxmlformats.org/presentationml/2006/main">
   <p:cSld>
     <p:bg>
       <p:bgPr>
@@ -9659,7 +9847,14 @@
         <p:cNvGrpSpPr/>
         <p:nvPr/>
       </p:nvGrpSpPr>
-      <p:grpSpPr/>
+      <p:grpSpPr>
+        <a:xfrm>
+          <a:off x="0" y="0"/>
+          <a:ext cx="0" cy="0"/>
+          <a:chOff x="0" y="0"/>
+          <a:chExt cx="0" cy="0"/>
+        </a:xfrm>
+      </p:grpSpPr>
       <p:sp>
         <p:nvSpPr>
           <p:cNvPr id="2" name="Rectangle 1"/>
@@ -9700,6 +9895,7 @@
           <a:lstStyle/>
           <a:p>
             <a:pPr algn="ctr"/>
+            <a:endParaRPr/>
           </a:p>
         </p:txBody>
       </p:sp>
@@ -9880,7 +10076,7 @@
 </file>
 
 <file path=ppt/slides/slide29.xml><?xml version="1.0" encoding="utf-8"?>
-<p:sld xmlns:a="http://schemas.openxmlformats.org/drawingml/2006/main" xmlns:p="http://schemas.openxmlformats.org/presentationml/2006/main" xmlns:r="http://schemas.openxmlformats.org/officeDocument/2006/relationships">
+<p:sld xmlns:a="http://schemas.openxmlformats.org/drawingml/2006/main" xmlns:r="http://schemas.openxmlformats.org/officeDocument/2006/relationships" xmlns:p="http://schemas.openxmlformats.org/presentationml/2006/main">
   <p:cSld>
     <p:bg>
       <p:bgPr>
@@ -9896,7 +10092,14 @@
         <p:cNvGrpSpPr/>
         <p:nvPr/>
       </p:nvGrpSpPr>
-      <p:grpSpPr/>
+      <p:grpSpPr>
+        <a:xfrm>
+          <a:off x="0" y="0"/>
+          <a:ext cx="0" cy="0"/>
+          <a:chOff x="0" y="0"/>
+          <a:chExt cx="0" cy="0"/>
+        </a:xfrm>
+      </p:grpSpPr>
       <p:sp>
         <p:nvSpPr>
           <p:cNvPr id="2" name="Rectangle 1"/>
@@ -9937,6 +10140,7 @@
           <a:lstStyle/>
           <a:p>
             <a:pPr algn="ctr"/>
+            <a:endParaRPr/>
           </a:p>
         </p:txBody>
       </p:sp>
@@ -10117,7 +10321,7 @@
 </file>
 
 <file path=ppt/slides/slide3.xml><?xml version="1.0" encoding="utf-8"?>
-<p:sld xmlns:a="http://schemas.openxmlformats.org/drawingml/2006/main" xmlns:p="http://schemas.openxmlformats.org/presentationml/2006/main" xmlns:r="http://schemas.openxmlformats.org/officeDocument/2006/relationships">
+<p:sld xmlns:a="http://schemas.openxmlformats.org/drawingml/2006/main" xmlns:r="http://schemas.openxmlformats.org/officeDocument/2006/relationships" xmlns:p="http://schemas.openxmlformats.org/presentationml/2006/main">
   <p:cSld>
     <p:bg>
       <p:bgPr>
@@ -10133,7 +10337,14 @@
         <p:cNvGrpSpPr/>
         <p:nvPr/>
       </p:nvGrpSpPr>
-      <p:grpSpPr/>
+      <p:grpSpPr>
+        <a:xfrm>
+          <a:off x="0" y="0"/>
+          <a:ext cx="0" cy="0"/>
+          <a:chOff x="0" y="0"/>
+          <a:chExt cx="0" cy="0"/>
+        </a:xfrm>
+      </p:grpSpPr>
       <p:sp>
         <p:nvSpPr>
           <p:cNvPr id="2" name="Rectangle 1"/>
@@ -10174,6 +10385,7 @@
           <a:lstStyle/>
           <a:p>
             <a:pPr algn="ctr"/>
+            <a:endParaRPr/>
           </a:p>
         </p:txBody>
       </p:sp>
@@ -10366,7 +10578,7 @@
 </file>
 
 <file path=ppt/slides/slide30.xml><?xml version="1.0" encoding="utf-8"?>
-<p:sld xmlns:a="http://schemas.openxmlformats.org/drawingml/2006/main" xmlns:p="http://schemas.openxmlformats.org/presentationml/2006/main" xmlns:r="http://schemas.openxmlformats.org/officeDocument/2006/relationships">
+<p:sld xmlns:a="http://schemas.openxmlformats.org/drawingml/2006/main" xmlns:r="http://schemas.openxmlformats.org/officeDocument/2006/relationships" xmlns:p="http://schemas.openxmlformats.org/presentationml/2006/main">
   <p:cSld>
     <p:bg>
       <p:bgPr>
@@ -10382,7 +10594,14 @@
         <p:cNvGrpSpPr/>
         <p:nvPr/>
       </p:nvGrpSpPr>
-      <p:grpSpPr/>
+      <p:grpSpPr>
+        <a:xfrm>
+          <a:off x="0" y="0"/>
+          <a:ext cx="0" cy="0"/>
+          <a:chOff x="0" y="0"/>
+          <a:chExt cx="0" cy="0"/>
+        </a:xfrm>
+      </p:grpSpPr>
       <p:sp>
         <p:nvSpPr>
           <p:cNvPr id="2" name="Rectangle 1"/>
@@ -10423,6 +10642,7 @@
           <a:lstStyle/>
           <a:p>
             <a:pPr algn="ctr"/>
+            <a:endParaRPr/>
           </a:p>
         </p:txBody>
       </p:sp>
@@ -10639,7 +10859,7 @@
 </file>
 
 <file path=ppt/slides/slide31.xml><?xml version="1.0" encoding="utf-8"?>
-<p:sld xmlns:a="http://schemas.openxmlformats.org/drawingml/2006/main" xmlns:p="http://schemas.openxmlformats.org/presentationml/2006/main" xmlns:r="http://schemas.openxmlformats.org/officeDocument/2006/relationships">
+<p:sld xmlns:a="http://schemas.openxmlformats.org/drawingml/2006/main" xmlns:r="http://schemas.openxmlformats.org/officeDocument/2006/relationships" xmlns:p="http://schemas.openxmlformats.org/presentationml/2006/main">
   <p:cSld>
     <p:bg>
       <p:bgPr>
@@ -10655,7 +10875,14 @@
         <p:cNvGrpSpPr/>
         <p:nvPr/>
       </p:nvGrpSpPr>
-      <p:grpSpPr/>
+      <p:grpSpPr>
+        <a:xfrm>
+          <a:off x="0" y="0"/>
+          <a:ext cx="0" cy="0"/>
+          <a:chOff x="0" y="0"/>
+          <a:chExt cx="0" cy="0"/>
+        </a:xfrm>
+      </p:grpSpPr>
       <p:sp>
         <p:nvSpPr>
           <p:cNvPr id="2" name="Rectangle 1"/>
@@ -10696,6 +10923,7 @@
           <a:lstStyle/>
           <a:p>
             <a:pPr algn="ctr"/>
+            <a:endParaRPr/>
           </a:p>
         </p:txBody>
       </p:sp>
@@ -10876,7 +11104,7 @@
 </file>
 
 <file path=ppt/slides/slide32.xml><?xml version="1.0" encoding="utf-8"?>
-<p:sld xmlns:a="http://schemas.openxmlformats.org/drawingml/2006/main" xmlns:p="http://schemas.openxmlformats.org/presentationml/2006/main" xmlns:r="http://schemas.openxmlformats.org/officeDocument/2006/relationships">
+<p:sld xmlns:a="http://schemas.openxmlformats.org/drawingml/2006/main" xmlns:r="http://schemas.openxmlformats.org/officeDocument/2006/relationships" xmlns:p="http://schemas.openxmlformats.org/presentationml/2006/main">
   <p:cSld>
     <p:bg>
       <p:bgPr>
@@ -10892,7 +11120,14 @@
         <p:cNvGrpSpPr/>
         <p:nvPr/>
       </p:nvGrpSpPr>
-      <p:grpSpPr/>
+      <p:grpSpPr>
+        <a:xfrm>
+          <a:off x="0" y="0"/>
+          <a:ext cx="0" cy="0"/>
+          <a:chOff x="0" y="0"/>
+          <a:chExt cx="0" cy="0"/>
+        </a:xfrm>
+      </p:grpSpPr>
       <p:sp>
         <p:nvSpPr>
           <p:cNvPr id="2" name="Rectangle 1"/>
@@ -10933,6 +11168,7 @@
           <a:lstStyle/>
           <a:p>
             <a:pPr algn="ctr"/>
+            <a:endParaRPr/>
           </a:p>
         </p:txBody>
       </p:sp>
@@ -10976,6 +11212,7 @@
           <a:lstStyle/>
           <a:p>
             <a:pPr algn="ctr"/>
+            <a:endParaRPr/>
           </a:p>
         </p:txBody>
       </p:sp>
@@ -11019,6 +11256,7 @@
           <a:lstStyle/>
           <a:p>
             <a:pPr algn="ctr"/>
+            <a:endParaRPr/>
           </a:p>
         </p:txBody>
       </p:sp>
@@ -11199,7 +11437,7 @@
 </file>
 
 <file path=ppt/slides/slide4.xml><?xml version="1.0" encoding="utf-8"?>
-<p:sld xmlns:a="http://schemas.openxmlformats.org/drawingml/2006/main" xmlns:p="http://schemas.openxmlformats.org/presentationml/2006/main" xmlns:r="http://schemas.openxmlformats.org/officeDocument/2006/relationships">
+<p:sld xmlns:a="http://schemas.openxmlformats.org/drawingml/2006/main" xmlns:r="http://schemas.openxmlformats.org/officeDocument/2006/relationships" xmlns:p="http://schemas.openxmlformats.org/presentationml/2006/main">
   <p:cSld>
     <p:bg>
       <p:bgPr>
@@ -11215,7 +11453,14 @@
         <p:cNvGrpSpPr/>
         <p:nvPr/>
       </p:nvGrpSpPr>
-      <p:grpSpPr/>
+      <p:grpSpPr>
+        <a:xfrm>
+          <a:off x="0" y="0"/>
+          <a:ext cx="0" cy="0"/>
+          <a:chOff x="0" y="0"/>
+          <a:chExt cx="0" cy="0"/>
+        </a:xfrm>
+      </p:grpSpPr>
       <p:sp>
         <p:nvSpPr>
           <p:cNvPr id="2" name="Rectangle 1"/>
@@ -11256,6 +11501,7 @@
           <a:lstStyle/>
           <a:p>
             <a:pPr algn="ctr"/>
+            <a:endParaRPr/>
           </a:p>
         </p:txBody>
       </p:sp>
@@ -11472,7 +11718,7 @@
 </file>
 
 <file path=ppt/slides/slide5.xml><?xml version="1.0" encoding="utf-8"?>
-<p:sld xmlns:a="http://schemas.openxmlformats.org/drawingml/2006/main" xmlns:p="http://schemas.openxmlformats.org/presentationml/2006/main" xmlns:r="http://schemas.openxmlformats.org/officeDocument/2006/relationships">
+<p:sld xmlns:a="http://schemas.openxmlformats.org/drawingml/2006/main" xmlns:r="http://schemas.openxmlformats.org/officeDocument/2006/relationships" xmlns:p="http://schemas.openxmlformats.org/presentationml/2006/main">
   <p:cSld>
     <p:bg>
       <p:bgPr>
@@ -11488,7 +11734,14 @@
         <p:cNvGrpSpPr/>
         <p:nvPr/>
       </p:nvGrpSpPr>
-      <p:grpSpPr/>
+      <p:grpSpPr>
+        <a:xfrm>
+          <a:off x="0" y="0"/>
+          <a:ext cx="0" cy="0"/>
+          <a:chOff x="0" y="0"/>
+          <a:chExt cx="0" cy="0"/>
+        </a:xfrm>
+      </p:grpSpPr>
       <p:sp>
         <p:nvSpPr>
           <p:cNvPr id="2" name="Rectangle 1"/>
@@ -11529,6 +11782,7 @@
           <a:lstStyle/>
           <a:p>
             <a:pPr algn="ctr"/>
+            <a:endParaRPr/>
           </a:p>
         </p:txBody>
       </p:sp>
@@ -11709,7 +11963,7 @@
 </file>
 
 <file path=ppt/slides/slide6.xml><?xml version="1.0" encoding="utf-8"?>
-<p:sld xmlns:a="http://schemas.openxmlformats.org/drawingml/2006/main" xmlns:p="http://schemas.openxmlformats.org/presentationml/2006/main" xmlns:r="http://schemas.openxmlformats.org/officeDocument/2006/relationships">
+<p:sld xmlns:a="http://schemas.openxmlformats.org/drawingml/2006/main" xmlns:r="http://schemas.openxmlformats.org/officeDocument/2006/relationships" xmlns:p="http://schemas.openxmlformats.org/presentationml/2006/main">
   <p:cSld>
     <p:bg>
       <p:bgPr>
@@ -11725,7 +11979,14 @@
         <p:cNvGrpSpPr/>
         <p:nvPr/>
       </p:nvGrpSpPr>
-      <p:grpSpPr/>
+      <p:grpSpPr>
+        <a:xfrm>
+          <a:off x="0" y="0"/>
+          <a:ext cx="0" cy="0"/>
+          <a:chOff x="0" y="0"/>
+          <a:chExt cx="0" cy="0"/>
+        </a:xfrm>
+      </p:grpSpPr>
       <p:sp>
         <p:nvSpPr>
           <p:cNvPr id="2" name="Rectangle 1"/>
@@ -11766,6 +12027,7 @@
           <a:lstStyle/>
           <a:p>
             <a:pPr algn="ctr"/>
+            <a:endParaRPr/>
           </a:p>
         </p:txBody>
       </p:sp>
@@ -11982,7 +12244,7 @@
 </file>
 
 <file path=ppt/slides/slide7.xml><?xml version="1.0" encoding="utf-8"?>
-<p:sld xmlns:a="http://schemas.openxmlformats.org/drawingml/2006/main" xmlns:p="http://schemas.openxmlformats.org/presentationml/2006/main" xmlns:r="http://schemas.openxmlformats.org/officeDocument/2006/relationships">
+<p:sld xmlns:a="http://schemas.openxmlformats.org/drawingml/2006/main" xmlns:r="http://schemas.openxmlformats.org/officeDocument/2006/relationships" xmlns:p="http://schemas.openxmlformats.org/presentationml/2006/main">
   <p:cSld>
     <p:bg>
       <p:bgPr>
@@ -11998,7 +12260,14 @@
         <p:cNvGrpSpPr/>
         <p:nvPr/>
       </p:nvGrpSpPr>
-      <p:grpSpPr/>
+      <p:grpSpPr>
+        <a:xfrm>
+          <a:off x="0" y="0"/>
+          <a:ext cx="0" cy="0"/>
+          <a:chOff x="0" y="0"/>
+          <a:chExt cx="0" cy="0"/>
+        </a:xfrm>
+      </p:grpSpPr>
       <p:sp>
         <p:nvSpPr>
           <p:cNvPr id="2" name="Rectangle 1"/>
@@ -12039,6 +12308,7 @@
           <a:lstStyle/>
           <a:p>
             <a:pPr algn="ctr"/>
+            <a:endParaRPr/>
           </a:p>
         </p:txBody>
       </p:sp>
@@ -12255,7 +12525,7 @@
 </file>
 
 <file path=ppt/slides/slide8.xml><?xml version="1.0" encoding="utf-8"?>
-<p:sld xmlns:a="http://schemas.openxmlformats.org/drawingml/2006/main" xmlns:p="http://schemas.openxmlformats.org/presentationml/2006/main" xmlns:r="http://schemas.openxmlformats.org/officeDocument/2006/relationships">
+<p:sld xmlns:a="http://schemas.openxmlformats.org/drawingml/2006/main" xmlns:r="http://schemas.openxmlformats.org/officeDocument/2006/relationships" xmlns:p="http://schemas.openxmlformats.org/presentationml/2006/main">
   <p:cSld>
     <p:bg>
       <p:bgPr>
@@ -12271,7 +12541,14 @@
         <p:cNvGrpSpPr/>
         <p:nvPr/>
       </p:nvGrpSpPr>
-      <p:grpSpPr/>
+      <p:grpSpPr>
+        <a:xfrm>
+          <a:off x="0" y="0"/>
+          <a:ext cx="0" cy="0"/>
+          <a:chOff x="0" y="0"/>
+          <a:chExt cx="0" cy="0"/>
+        </a:xfrm>
+      </p:grpSpPr>
       <p:sp>
         <p:nvSpPr>
           <p:cNvPr id="2" name="Rectangle 1"/>
@@ -12312,6 +12589,7 @@
           <a:lstStyle/>
           <a:p>
             <a:pPr algn="ctr"/>
+            <a:endParaRPr/>
           </a:p>
         </p:txBody>
       </p:sp>
@@ -12492,7 +12770,7 @@
 </file>
 
 <file path=ppt/slides/slide9.xml><?xml version="1.0" encoding="utf-8"?>
-<p:sld xmlns:a="http://schemas.openxmlformats.org/drawingml/2006/main" xmlns:p="http://schemas.openxmlformats.org/presentationml/2006/main" xmlns:r="http://schemas.openxmlformats.org/officeDocument/2006/relationships">
+<p:sld xmlns:a="http://schemas.openxmlformats.org/drawingml/2006/main" xmlns:r="http://schemas.openxmlformats.org/officeDocument/2006/relationships" xmlns:p="http://schemas.openxmlformats.org/presentationml/2006/main">
   <p:cSld>
     <p:bg>
       <p:bgPr>
@@ -12508,7 +12786,14 @@
         <p:cNvGrpSpPr/>
         <p:nvPr/>
       </p:nvGrpSpPr>
-      <p:grpSpPr/>
+      <p:grpSpPr>
+        <a:xfrm>
+          <a:off x="0" y="0"/>
+          <a:ext cx="0" cy="0"/>
+          <a:chOff x="0" y="0"/>
+          <a:chExt cx="0" cy="0"/>
+        </a:xfrm>
+      </p:grpSpPr>
       <p:sp>
         <p:nvSpPr>
           <p:cNvPr id="2" name="Rectangle 1"/>
@@ -12549,6 +12834,7 @@
           <a:lstStyle/>
           <a:p>
             <a:pPr algn="ctr"/>
+            <a:endParaRPr/>
           </a:p>
         </p:txBody>
       </p:sp>
